--- a/yunqi-2026-agenda-201/docs/洞察一页-02-Agent Sandbox 加速训练与评测闭环与百炼 A.pptx
+++ b/yunqi-2026-agenda-201/docs/洞察一页-02-Agent Sandbox 加速训练与评测闭环与百炼 A.pptx
@@ -3141,7 +3141,7 @@
         <p:spPr>
           <a:xfrm>
             <a:off x="0" y="0"/>
-            <a:ext cx="12191695" cy="1051560"/>
+            <a:ext cx="12191695" cy="1097280"/>
           </a:xfrm>
           <a:prstGeom prst="rect">
             <a:avLst/>
@@ -3183,8 +3183,8 @@
         </p:nvSpPr>
         <p:spPr>
           <a:xfrm>
-            <a:off x="365760" y="146304"/>
-            <a:ext cx="11430000" cy="274320"/>
+            <a:off x="320040" y="91440"/>
+            <a:ext cx="11521440" cy="237744"/>
           </a:xfrm>
           <a:prstGeom prst="rect">
             <a:avLst/>
@@ -3199,7 +3199,7 @@
           <a:p>
             <a:pPr algn="l"/>
             <a:r>
-              <a:rPr sz="1300" b="0">
+              <a:rPr sz="1200" b="0">
                 <a:solidFill>
                   <a:srgbClr val="6B6B6B"/>
                 </a:solidFill>
@@ -3219,8 +3219,8 @@
         </p:nvSpPr>
         <p:spPr>
           <a:xfrm>
-            <a:off x="365760" y="420624"/>
-            <a:ext cx="11430000" cy="502920"/>
+            <a:off x="320040" y="347472"/>
+            <a:ext cx="11521440" cy="658368"/>
           </a:xfrm>
           <a:prstGeom prst="rect">
             <a:avLst/>
@@ -3235,14 +3235,14 @@
           <a:p>
             <a:pPr algn="l"/>
             <a:r>
-              <a:rPr sz="2000" b="1">
+              <a:rPr sz="1600" b="1">
                 <a:solidFill>
                   <a:srgbClr val="1A1A1A"/>
                 </a:solidFill>
                 <a:latin typeface="Microsoft YaHei"/>
                 <a:ea typeface="Microsoft YaHei"/>
               </a:rPr>
-              <a:t>洞察：把 Agent Sandbox 定位为 RL 采样与 Agent 工具执行的共享执行面，用 E…</a:t>
+              <a:t>洞察：把 Agent Sandbox 定位为 RL 采样与 Agent 工具执行的共享执行面，用 E2B 兼容 API + MicroVM 隔离进入 HCS 产品目录。</a:t>
             </a:r>
           </a:p>
         </p:txBody>
@@ -3255,8 +3255,8 @@
         </p:nvSpPr>
         <p:spPr>
           <a:xfrm>
-            <a:off x="320040" y="1207008"/>
-            <a:ext cx="11521440" cy="502920"/>
+            <a:off x="274320" y="1207008"/>
+            <a:ext cx="11612880" cy="749808"/>
           </a:xfrm>
           <a:prstGeom prst="rect">
             <a:avLst/>
@@ -3300,8 +3300,8 @@
         </p:nvSpPr>
         <p:spPr>
           <a:xfrm>
-            <a:off x="457200" y="1298448"/>
-            <a:ext cx="11247120" cy="365760"/>
+            <a:off x="411480" y="1261872"/>
+            <a:ext cx="11338560" cy="640080"/>
           </a:xfrm>
           <a:prstGeom prst="rect">
             <a:avLst/>
@@ -3316,14 +3316,14 @@
           <a:p>
             <a:pPr algn="l"/>
             <a:r>
-              <a:rPr sz="1300" b="1">
+              <a:rPr sz="1200" b="1">
                 <a:solidFill>
                   <a:srgbClr val="1A1A1A"/>
                 </a:solidFill>
                 <a:latin typeface="Microsoft YaHei"/>
                 <a:ea typeface="Microsoft YaHei"/>
               </a:rPr>
-              <a:t>一句话判断：本场前半由洪晓龙产品化讲解 Agent Sandbox：以 API First、E2B 原生兼容将代码任务、交互任务与批量评测统一到 MicroVM 隔离环境，支撑探索、验证与规模评测。后半由罗自荣展开百炼多租户企业级…</a:t>
+              <a:t>一句话判断：本场前半由洪晓龙产品化讲解 Agent Sandbox：以 API First、E2B 原生兼容将代码任务、交互任务与批量评测统一到 MicroVM 隔离环境，支撑探索、验证与规模评测。</a:t>
             </a:r>
           </a:p>
         </p:txBody>
@@ -3336,8 +3336,8 @@
         </p:nvSpPr>
         <p:spPr>
           <a:xfrm>
-            <a:off x="320040" y="1874519"/>
-            <a:ext cx="3703320" cy="2606040"/>
+            <a:off x="274320" y="2084831"/>
+            <a:ext cx="3749039" cy="2267712"/>
           </a:xfrm>
           <a:prstGeom prst="rect">
             <a:avLst/>
@@ -3381,8 +3381,8 @@
         </p:nvSpPr>
         <p:spPr>
           <a:xfrm>
-            <a:off x="457200" y="2011679"/>
-            <a:ext cx="3429000" cy="320040"/>
+            <a:off x="402336" y="2176271"/>
+            <a:ext cx="3493007" cy="292608"/>
           </a:xfrm>
           <a:prstGeom prst="rect">
             <a:avLst/>
@@ -3397,14 +3397,14 @@
           <a:p>
             <a:pPr algn="l"/>
             <a:r>
-              <a:rPr sz="1500" b="1">
+              <a:rPr sz="1400" b="1">
                 <a:solidFill>
                   <a:srgbClr val="8B1A2B"/>
                 </a:solidFill>
                 <a:latin typeface="Microsoft YaHei"/>
                 <a:ea typeface="Microsoft YaHei"/>
               </a:rPr>
-              <a:t>01  Agent Sandbox：工…</a:t>
+              <a:t>01  工具与环境执行产品化</a:t>
             </a:r>
           </a:p>
         </p:txBody>
@@ -3417,8 +3417,8 @@
         </p:nvSpPr>
         <p:spPr>
           <a:xfrm>
-            <a:off x="484632" y="2377439"/>
-            <a:ext cx="3374136" cy="1965960"/>
+            <a:off x="402336" y="2487167"/>
+            <a:ext cx="3493007" cy="1764792"/>
           </a:xfrm>
           <a:prstGeom prst="rect">
             <a:avLst/>
@@ -3433,52 +3433,69 @@
           <a:p>
             <a:pPr algn="l">
               <a:spcAft>
-                <a:spcPts val="400"/>
+                <a:spcPts val="200"/>
               </a:spcAft>
             </a:pPr>
             <a:r>
-              <a:rPr sz="1200" b="1">
+              <a:rPr sz="1100" b="1">
                 <a:solidFill>
                   <a:srgbClr val="1A1A1A"/>
                 </a:solidFill>
                 <a:latin typeface="Microsoft YaHei"/>
                 <a:ea typeface="Microsoft YaHei"/>
               </a:rPr>
-              <a:t>输入任务类型：代码（仓库/依赖/测试）、交互（浏览器/文件/工具）、批量评测（多任…</a:t>
+              <a:t>HCS 应把「评测/训练用临时环境」与「在线 Serving 沙箱」统一为同一产品的不同 QoS 档位，并提供 E2B 兼容 SDK</a:t>
             </a:r>
           </a:p>
           <a:p>
             <a:pPr algn="l">
               <a:spcAft>
-                <a:spcPts val="400"/>
+                <a:spcPts val="200"/>
               </a:spcAft>
             </a:pPr>
             <a:r>
-              <a:rPr sz="1200" b="0">
+              <a:rPr sz="1100" b="0">
                 <a:solidFill>
                   <a:srgbClr val="4A4A4A"/>
                 </a:solidFill>
                 <a:latin typeface="Microsoft YaHei"/>
                 <a:ea typeface="Microsoft YaHei"/>
               </a:rPr>
-              <a:t>• 核心能力：镜像缓存与按需加载实现极速就绪；批量创建与按需回收实现弹性供给；MicroVM + 访问控制实现安全隔离；任务状态与多步交互…</a:t>
+              <a:t>• 输入任务类型：代码（仓库/依赖/测试）、交互（浏览器/文件/工具）、批量评测（多任务多尝试）。</a:t>
             </a:r>
           </a:p>
           <a:p>
             <a:pPr algn="l">
               <a:spcAft>
-                <a:spcPts val="400"/>
+                <a:spcPts val="200"/>
               </a:spcAft>
             </a:pPr>
             <a:r>
-              <a:rPr sz="1200" b="0">
+              <a:rPr sz="1100" b="0">
                 <a:solidFill>
                   <a:srgbClr val="4A4A4A"/>
                 </a:solidFill>
                 <a:latin typeface="Microsoft YaHei"/>
                 <a:ea typeface="Microsoft YaHei"/>
               </a:rPr>
-              <a:t>• 生命周期：准备→创建（每次 attempt 独立环境）→执行（多步交互回传结果）→回收；环境日志指标可关联上层轨迹，由百炼统一训练观测。</a:t>
+              <a:t>• 核心能力：镜像缓存与按需加载实现极速就绪</a:t>
+            </a:r>
+          </a:p>
+          <a:p>
+            <a:pPr algn="l">
+              <a:spcAft>
+                <a:spcPts val="200"/>
+              </a:spcAft>
+            </a:pPr>
+            <a:r>
+              <a:rPr sz="1100" b="0">
+                <a:solidFill>
+                  <a:srgbClr val="4A4A4A"/>
+                </a:solidFill>
+                <a:latin typeface="Microsoft YaHei"/>
+                <a:ea typeface="Microsoft YaHei"/>
+              </a:rPr>
+              <a:t>• 生命周期：准备→创建（每次 attempt 独立环境）→执行（多步交互回传结果）→回收</a:t>
             </a:r>
           </a:p>
         </p:txBody>
@@ -3491,8 +3508,8 @@
         </p:nvSpPr>
         <p:spPr>
           <a:xfrm>
-            <a:off x="4224528" y="1874519"/>
-            <a:ext cx="3703320" cy="2606040"/>
+            <a:off x="4187951" y="2084831"/>
+            <a:ext cx="3749039" cy="2267712"/>
           </a:xfrm>
           <a:prstGeom prst="rect">
             <a:avLst/>
@@ -3536,8 +3553,8 @@
         </p:nvSpPr>
         <p:spPr>
           <a:xfrm>
-            <a:off x="4361688" y="2011679"/>
-            <a:ext cx="3429000" cy="320040"/>
+            <a:off x="4315967" y="2176271"/>
+            <a:ext cx="3493007" cy="292608"/>
           </a:xfrm>
           <a:prstGeom prst="rect">
             <a:avLst/>
@@ -3552,14 +3569,14 @@
           <a:p>
             <a:pPr algn="l"/>
             <a:r>
-              <a:rPr sz="1500" b="1">
+              <a:rPr sz="1400" b="1">
                 <a:solidFill>
                   <a:srgbClr val="8B1A2B"/>
                 </a:solidFill>
                 <a:latin typeface="Microsoft YaHei"/>
                 <a:ea typeface="Microsoft YaHei"/>
               </a:rPr>
-              <a:t>02  百炼 Loop Enginee…</a:t>
+              <a:t>02  百炼 Loop Engineering</a:t>
             </a:r>
           </a:p>
         </p:txBody>
@@ -3572,8 +3589,8 @@
         </p:nvSpPr>
         <p:spPr>
           <a:xfrm>
-            <a:off x="4389120" y="2377439"/>
-            <a:ext cx="3374136" cy="1965960"/>
+            <a:off x="4315967" y="2487167"/>
+            <a:ext cx="3493007" cy="1764792"/>
           </a:xfrm>
           <a:prstGeom prst="rect">
             <a:avLst/>
@@ -3588,52 +3605,69 @@
           <a:p>
             <a:pPr algn="l">
               <a:spcAft>
-                <a:spcPts val="400"/>
+                <a:spcPts val="200"/>
               </a:spcAft>
             </a:pPr>
             <a:r>
-              <a:rPr sz="1200" b="1">
+              <a:rPr sz="1100" b="1">
                 <a:solidFill>
                   <a:srgbClr val="1A1A1A"/>
                 </a:solidFill>
                 <a:latin typeface="Microsoft YaHei"/>
                 <a:ea typeface="Microsoft YaHei"/>
               </a:rPr>
-              <a:t>RL Loop：策略模型 → Sandbox 交互采样（Rollout/多步轨迹）…</a:t>
+              <a:t>HCS 规划 RL 平台时必须把 Sandbox 作为采样与奖励执行的一等公民，而不是训练集群附属脚本</a:t>
             </a:r>
           </a:p>
           <a:p>
             <a:pPr algn="l">
               <a:spcAft>
-                <a:spcPts val="400"/>
+                <a:spcPts val="200"/>
               </a:spcAft>
             </a:pPr>
             <a:r>
-              <a:rPr sz="1200" b="0">
+              <a:rPr sz="1100" b="0">
                 <a:solidFill>
                   <a:srgbClr val="4A4A4A"/>
                 </a:solidFill>
                 <a:latin typeface="Microsoft YaHei"/>
                 <a:ea typeface="Microsoft YaHei"/>
               </a:rPr>
-              <a:t>• Agent Loop：模型决策 → 工具调用（内置工具 + MCP，Sandbox 承载）→ 环境执行（代码/浏览器/文件）→ 结果反…</a:t>
+              <a:t>• RL Loop：策略模型 → Sandbox 交互采样（Rollout/多步轨迹）→ Sandbox 奖励反馈 → 参数更新</a:t>
             </a:r>
           </a:p>
           <a:p>
             <a:pPr algn="l">
               <a:spcAft>
-                <a:spcPts val="400"/>
+                <a:spcPts val="200"/>
               </a:spcAft>
             </a:pPr>
             <a:r>
-              <a:rPr sz="1200" b="0">
+              <a:rPr sz="1100" b="0">
                 <a:solidFill>
                   <a:srgbClr val="4A4A4A"/>
                 </a:solidFill>
                 <a:latin typeface="Microsoft YaHei"/>
                 <a:ea typeface="Microsoft YaHei"/>
               </a:rPr>
-              <a:t>• 价值主张：5 分钟上手即用即毁；创建速率 10 万/分钟；超大规格 1~2s 并发启动（5000 并发、3GB 异构镜像）；深休眠等能…</a:t>
+              <a:t>• Agent Loop：模型决策 → 工具调用（内置工具 + MCP，Sandbox 承载）→ 环境执行（代码/浏览器/文件）→ 结果反馈</a:t>
+            </a:r>
+          </a:p>
+          <a:p>
+            <a:pPr algn="l">
+              <a:spcAft>
+                <a:spcPts val="200"/>
+              </a:spcAft>
+            </a:pPr>
+            <a:r>
+              <a:rPr sz="1100" b="0">
+                <a:solidFill>
+                  <a:srgbClr val="4A4A4A"/>
+                </a:solidFill>
+                <a:latin typeface="Microsoft YaHei"/>
+                <a:ea typeface="Microsoft YaHei"/>
+              </a:rPr>
+              <a:t>• 价值主张：5 分钟上手即用即毁</a:t>
             </a:r>
           </a:p>
         </p:txBody>
@@ -3646,8 +3680,8 @@
         </p:nvSpPr>
         <p:spPr>
           <a:xfrm>
-            <a:off x="8129016" y="1874519"/>
-            <a:ext cx="3703320" cy="2606040"/>
+            <a:off x="8101582" y="2084831"/>
+            <a:ext cx="3749039" cy="2267712"/>
           </a:xfrm>
           <a:prstGeom prst="rect">
             <a:avLst/>
@@ -3691,8 +3725,8 @@
         </p:nvSpPr>
         <p:spPr>
           <a:xfrm>
-            <a:off x="8266176" y="2011679"/>
-            <a:ext cx="3429000" cy="320040"/>
+            <a:off x="8229598" y="2176271"/>
+            <a:ext cx="3493007" cy="292608"/>
           </a:xfrm>
           <a:prstGeom prst="rect">
             <a:avLst/>
@@ -3707,7 +3741,7 @@
           <a:p>
             <a:pPr algn="l"/>
             <a:r>
-              <a:rPr sz="1500" b="1">
+              <a:rPr sz="1400" b="1">
                 <a:solidFill>
                   <a:srgbClr val="8B1A2B"/>
                 </a:solidFill>
@@ -3727,8 +3761,8 @@
         </p:nvSpPr>
         <p:spPr>
           <a:xfrm>
-            <a:off x="8293608" y="2377439"/>
-            <a:ext cx="3374136" cy="1965960"/>
+            <a:off x="8229598" y="2487167"/>
+            <a:ext cx="3493007" cy="1764792"/>
           </a:xfrm>
           <a:prstGeom prst="rect">
             <a:avLst/>
@@ -3743,45 +3777,62 @@
           <a:p>
             <a:pPr algn="l">
               <a:spcAft>
-                <a:spcPts val="400"/>
+                <a:spcPts val="200"/>
               </a:spcAft>
             </a:pPr>
             <a:r>
-              <a:rPr sz="1200" b="1">
+              <a:rPr sz="1100" b="1">
                 <a:solidFill>
                   <a:srgbClr val="1A1A1A"/>
                 </a:solidFill>
                 <a:latin typeface="Microsoft YaHei"/>
                 <a:ea typeface="Microsoft YaHei"/>
               </a:rPr>
-              <a:t>产品能力：数据管理、模型调优、一键部署推理、多维评测自动打分。</a:t>
+              <a:t>ModelArts/EI 路线需把 GRPO/PPO 与蒸馏（类 OPD）做成托管能力，并强制「先评测集后训练」工作流</a:t>
             </a:r>
           </a:p>
           <a:p>
             <a:pPr algn="l">
               <a:spcAft>
-                <a:spcPts val="400"/>
+                <a:spcPts val="200"/>
               </a:spcAft>
             </a:pPr>
             <a:r>
-              <a:rPr sz="1200" b="0">
+              <a:rPr sz="1100" b="0">
                 <a:solidFill>
                   <a:srgbClr val="4A4A4A"/>
                 </a:solidFill>
                 <a:latin typeface="Microsoft YaHei"/>
                 <a:ea typeface="Microsoft YaHei"/>
               </a:rPr>
-              <a:t>• 训练方法：CPT、SFT、DPO、RL（PPO/GRPO）、自研 OPD（On-Policy Distillation）。</a:t>
+              <a:t>• 产品能力：数据管理、模型调优、一键部署推理、多维评测自动打分。</a:t>
             </a:r>
           </a:p>
           <a:p>
             <a:pPr algn="l">
               <a:spcAft>
-                <a:spcPts val="400"/>
+                <a:spcPts val="200"/>
               </a:spcAft>
             </a:pPr>
             <a:r>
-              <a:rPr sz="1200" b="0">
+              <a:rPr sz="1100" b="0">
+                <a:solidFill>
+                  <a:srgbClr val="4A4A4A"/>
+                </a:solidFill>
+                <a:latin typeface="Microsoft YaHei"/>
+                <a:ea typeface="Microsoft YaHei"/>
+              </a:rPr>
+              <a:t>• 训练方法：CPT、SFT、DPO、RL（PPO/GRPO）、自研 OPD（On-Policy Distillation）</a:t>
+            </a:r>
+          </a:p>
+          <a:p>
+            <a:pPr algn="l">
+              <a:spcAft>
+                <a:spcPts val="200"/>
+              </a:spcAft>
+            </a:pPr>
+            <a:r>
+              <a:rPr sz="1100" b="0">
                 <a:solidFill>
                   <a:srgbClr val="4A4A4A"/>
                 </a:solidFill>
@@ -3791,23 +3842,6 @@
               <a:t>• 支持模态：文本 LLM、视觉语言、文生图/视频、TTS/语音、多模态 Omni。</a:t>
             </a:r>
           </a:p>
-          <a:p>
-            <a:pPr algn="l">
-              <a:spcAft>
-                <a:spcPts val="400"/>
-              </a:spcAft>
-            </a:pPr>
-            <a:r>
-              <a:rPr sz="1200" b="0">
-                <a:solidFill>
-                  <a:srgbClr val="4A4A4A"/>
-                </a:solidFill>
-                <a:latin typeface="Microsoft YaHei"/>
-                <a:ea typeface="Microsoft YaHei"/>
-              </a:rPr>
-              <a:t>• 典型流程：构建评测集→发起训练→观察指标→效果评估（含 RL&amp;OPD 轨迹与日志）→部署→评测分析→迭代。</a:t>
-            </a:r>
-          </a:p>
         </p:txBody>
       </p:sp>
       <p:sp>
@@ -3818,8 +3852,8 @@
         </p:nvSpPr>
         <p:spPr>
           <a:xfrm>
-            <a:off x="320040" y="4617720"/>
-            <a:ext cx="7315200" cy="256032"/>
+            <a:off x="274320" y="4553712"/>
+            <a:ext cx="7315200" cy="237744"/>
           </a:xfrm>
           <a:prstGeom prst="rect">
             <a:avLst/>
@@ -3834,7 +3868,7 @@
           <a:p>
             <a:pPr algn="l"/>
             <a:r>
-              <a:rPr sz="1400" b="1">
+              <a:rPr sz="1300" b="1">
                 <a:solidFill>
                   <a:srgbClr val="1A1A1A"/>
                 </a:solidFill>
@@ -3854,8 +3888,8 @@
         </p:nvSpPr>
         <p:spPr>
           <a:xfrm>
-            <a:off x="320040" y="4910328"/>
-            <a:ext cx="1847088" cy="868680"/>
+            <a:off x="274320" y="4809744"/>
+            <a:ext cx="1874519" cy="960120"/>
           </a:xfrm>
           <a:prstGeom prst="rect">
             <a:avLst/>
@@ -3899,8 +3933,8 @@
         </p:nvSpPr>
         <p:spPr>
           <a:xfrm>
-            <a:off x="429768" y="4965192"/>
-            <a:ext cx="1664208" cy="201168"/>
+            <a:off x="365760" y="4864608"/>
+            <a:ext cx="1709927" cy="201168"/>
           </a:xfrm>
           <a:prstGeom prst="rect">
             <a:avLst/>
@@ -3922,7 +3956,7 @@
                 <a:latin typeface="Microsoft YaHei"/>
                 <a:ea typeface="Microsoft YaHei"/>
               </a:rPr>
-              <a:t>Agent Sandb…</a:t>
+              <a:t>接口</a:t>
             </a:r>
           </a:p>
         </p:txBody>
@@ -3935,8 +3969,8 @@
         </p:nvSpPr>
         <p:spPr>
           <a:xfrm>
-            <a:off x="429768" y="5166360"/>
-            <a:ext cx="1664208" cy="237744"/>
+            <a:off x="365760" y="5065776"/>
+            <a:ext cx="1709927" cy="256032"/>
           </a:xfrm>
           <a:prstGeom prst="rect">
             <a:avLst/>
@@ -3958,7 +3992,7 @@
                 <a:latin typeface="Microsoft YaHei"/>
                 <a:ea typeface="Microsoft YaHei"/>
               </a:rPr>
-              <a:t>隔离：MicroVM + 访问…</a:t>
+              <a:t>演讲口径</a:t>
             </a:r>
           </a:p>
         </p:txBody>
@@ -3971,8 +4005,8 @@
         </p:nvSpPr>
         <p:spPr>
           <a:xfrm>
-            <a:off x="429768" y="5413248"/>
-            <a:ext cx="1664208" cy="292608"/>
+            <a:off x="365760" y="5340096"/>
+            <a:ext cx="1709927" cy="365760"/>
           </a:xfrm>
           <a:prstGeom prst="rect">
             <a:avLst/>
@@ -3987,14 +4021,14 @@
           <a:p>
             <a:pPr algn="l"/>
             <a:r>
-              <a:rPr sz="1400" b="1">
+              <a:rPr sz="1200" b="1">
                 <a:solidFill>
                   <a:srgbClr val="8B1A2B"/>
                 </a:solidFill>
                 <a:latin typeface="Microsoft YaHei"/>
                 <a:ea typeface="Microsoft YaHei"/>
               </a:rPr>
-              <a:t>隔离：MicroVM + 访问控制</a:t>
+              <a:t>API First · E2B 原生兼容</a:t>
             </a:r>
           </a:p>
         </p:txBody>
@@ -4007,8 +4041,8 @@
         </p:nvSpPr>
         <p:spPr>
           <a:xfrm>
-            <a:off x="2276856" y="4910328"/>
-            <a:ext cx="1847088" cy="868680"/>
+            <a:off x="2240279" y="4809744"/>
+            <a:ext cx="1874519" cy="960120"/>
           </a:xfrm>
           <a:prstGeom prst="rect">
             <a:avLst/>
@@ -4052,8 +4086,8 @@
         </p:nvSpPr>
         <p:spPr>
           <a:xfrm>
-            <a:off x="2386584" y="4965192"/>
-            <a:ext cx="1664208" cy="201168"/>
+            <a:off x="2331719" y="4864608"/>
+            <a:ext cx="1709927" cy="201168"/>
           </a:xfrm>
           <a:prstGeom prst="rect">
             <a:avLst/>
@@ -4075,7 +4109,7 @@
                 <a:latin typeface="Microsoft YaHei"/>
                 <a:ea typeface="Microsoft YaHei"/>
               </a:rPr>
-              <a:t>百炼 Loop Eng…</a:t>
+              <a:t>隔离</a:t>
             </a:r>
           </a:p>
         </p:txBody>
@@ -4088,8 +4122,8 @@
         </p:nvSpPr>
         <p:spPr>
           <a:xfrm>
-            <a:off x="2386584" y="5166360"/>
-            <a:ext cx="1664208" cy="237744"/>
+            <a:off x="2331719" y="5065776"/>
+            <a:ext cx="1709927" cy="256032"/>
           </a:xfrm>
           <a:prstGeom prst="rect">
             <a:avLst/>
@@ -4111,7 +4145,7 @@
                 <a:latin typeface="Microsoft YaHei"/>
                 <a:ea typeface="Microsoft YaHei"/>
               </a:rPr>
-              <a:t>创建速率：100,000/分钟</a:t>
+              <a:t>演讲口径</a:t>
             </a:r>
           </a:p>
         </p:txBody>
@@ -4124,8 +4158,8 @@
         </p:nvSpPr>
         <p:spPr>
           <a:xfrm>
-            <a:off x="2386584" y="5413248"/>
-            <a:ext cx="1664208" cy="292608"/>
+            <a:off x="2331719" y="5340096"/>
+            <a:ext cx="1709927" cy="365760"/>
           </a:xfrm>
           <a:prstGeom prst="rect">
             <a:avLst/>
@@ -4140,14 +4174,14 @@
           <a:p>
             <a:pPr algn="l"/>
             <a:r>
-              <a:rPr sz="1400" b="1">
+              <a:rPr sz="1200" b="1">
                 <a:solidFill>
                   <a:srgbClr val="8B1A2B"/>
                 </a:solidFill>
                 <a:latin typeface="Microsoft YaHei"/>
                 <a:ea typeface="Microsoft YaHei"/>
               </a:rPr>
-              <a:t>上手：5 分钟</a:t>
+              <a:t>MicroVM + 访问控制</a:t>
             </a:r>
           </a:p>
         </p:txBody>
@@ -4160,8 +4194,8 @@
         </p:nvSpPr>
         <p:spPr>
           <a:xfrm>
-            <a:off x="4233672" y="4910328"/>
-            <a:ext cx="1847088" cy="868680"/>
+            <a:off x="4206238" y="4809744"/>
+            <a:ext cx="1874519" cy="960120"/>
           </a:xfrm>
           <a:prstGeom prst="rect">
             <a:avLst/>
@@ -4205,8 +4239,8 @@
         </p:nvSpPr>
         <p:spPr>
           <a:xfrm>
-            <a:off x="4343400" y="4965192"/>
-            <a:ext cx="1664208" cy="201168"/>
+            <a:off x="4297678" y="4864608"/>
+            <a:ext cx="1709927" cy="201168"/>
           </a:xfrm>
           <a:prstGeom prst="rect">
             <a:avLst/>
@@ -4228,7 +4262,7 @@
                 <a:latin typeface="Microsoft YaHei"/>
                 <a:ea typeface="Microsoft YaHei"/>
               </a:rPr>
-              <a:t>百炼模型训练产品矩阵与…</a:t>
+              <a:t>上手</a:t>
             </a:r>
           </a:p>
         </p:txBody>
@@ -4241,8 +4275,8 @@
         </p:nvSpPr>
         <p:spPr>
           <a:xfrm>
-            <a:off x="4343400" y="5166360"/>
-            <a:ext cx="1664208" cy="237744"/>
+            <a:off x="4297678" y="5065776"/>
+            <a:ext cx="1709927" cy="256032"/>
           </a:xfrm>
           <a:prstGeom prst="rect">
             <a:avLst/>
@@ -4264,7 +4298,7 @@
                 <a:latin typeface="Microsoft YaHei"/>
                 <a:ea typeface="Microsoft YaHei"/>
               </a:rPr>
-              <a:t>蒸馏：OPD 作为一等训练方法</a:t>
+              <a:t>演讲口径</a:t>
             </a:r>
           </a:p>
         </p:txBody>
@@ -4277,8 +4311,8 @@
         </p:nvSpPr>
         <p:spPr>
           <a:xfrm>
-            <a:off x="4343400" y="5413248"/>
-            <a:ext cx="1664208" cy="292608"/>
+            <a:off x="4297678" y="5340096"/>
+            <a:ext cx="1709927" cy="365760"/>
           </a:xfrm>
           <a:prstGeom prst="rect">
             <a:avLst/>
@@ -4293,14 +4327,14 @@
           <a:p>
             <a:pPr algn="l"/>
             <a:r>
-              <a:rPr sz="1400" b="1">
+              <a:rPr sz="1200" b="1">
                 <a:solidFill>
                   <a:srgbClr val="8B1A2B"/>
                 </a:solidFill>
                 <a:latin typeface="Microsoft YaHei"/>
                 <a:ea typeface="Microsoft YaHei"/>
               </a:rPr>
-              <a:t>蒸馏：OPD 作为一等训练方法</a:t>
+              <a:t>5 分钟</a:t>
             </a:r>
           </a:p>
         </p:txBody>
@@ -4313,8 +4347,8 @@
         </p:nvSpPr>
         <p:spPr>
           <a:xfrm>
-            <a:off x="6190488" y="4910328"/>
-            <a:ext cx="1847088" cy="868680"/>
+            <a:off x="6172197" y="4809744"/>
+            <a:ext cx="1874519" cy="960120"/>
           </a:xfrm>
           <a:prstGeom prst="rect">
             <a:avLst/>
@@ -4358,8 +4392,8 @@
         </p:nvSpPr>
         <p:spPr>
           <a:xfrm>
-            <a:off x="6300216" y="4965192"/>
-            <a:ext cx="1664208" cy="201168"/>
+            <a:off x="6263637" y="4864608"/>
+            <a:ext cx="1709927" cy="201168"/>
           </a:xfrm>
           <a:prstGeom prst="rect">
             <a:avLst/>
@@ -4381,7 +4415,7 @@
                 <a:latin typeface="Microsoft YaHei"/>
                 <a:ea typeface="Microsoft YaHei"/>
               </a:rPr>
-              <a:t>多租户 Agentic…</a:t>
+              <a:t>创建速率</a:t>
             </a:r>
           </a:p>
         </p:txBody>
@@ -4394,8 +4428,8 @@
         </p:nvSpPr>
         <p:spPr>
           <a:xfrm>
-            <a:off x="6300216" y="5166360"/>
-            <a:ext cx="1664208" cy="237744"/>
+            <a:off x="6263637" y="5065776"/>
+            <a:ext cx="1709927" cy="256032"/>
           </a:xfrm>
           <a:prstGeom prst="rect">
             <a:avLst/>
@@ -4417,7 +4451,7 @@
                 <a:latin typeface="Microsoft YaHei"/>
                 <a:ea typeface="Microsoft YaHei"/>
               </a:rPr>
-              <a:t>执行隔离：Agent Sand…</a:t>
+              <a:t>演讲口径</a:t>
             </a:r>
           </a:p>
         </p:txBody>
@@ -4430,8 +4464,8 @@
         </p:nvSpPr>
         <p:spPr>
           <a:xfrm>
-            <a:off x="6300216" y="5413248"/>
-            <a:ext cx="1664208" cy="292608"/>
+            <a:off x="6263637" y="5340096"/>
+            <a:ext cx="1709927" cy="365760"/>
           </a:xfrm>
           <a:prstGeom prst="rect">
             <a:avLst/>
@@ -4446,14 +4480,14 @@
           <a:p>
             <a:pPr algn="l"/>
             <a:r>
-              <a:rPr sz="1400" b="1">
+              <a:rPr sz="1200" b="1">
                 <a:solidFill>
                   <a:srgbClr val="8B1A2B"/>
                 </a:solidFill>
                 <a:latin typeface="Microsoft YaHei"/>
                 <a:ea typeface="Microsoft YaHei"/>
               </a:rPr>
-              <a:t>执行隔离：Agent Sandbo…</a:t>
+              <a:t>100,000/分钟</a:t>
             </a:r>
           </a:p>
         </p:txBody>
@@ -4466,8 +4500,8 @@
         </p:nvSpPr>
         <p:spPr>
           <a:xfrm>
-            <a:off x="8147304" y="4910328"/>
-            <a:ext cx="1847088" cy="868680"/>
+            <a:off x="8138156" y="4809744"/>
+            <a:ext cx="1874519" cy="960120"/>
           </a:xfrm>
           <a:prstGeom prst="rect">
             <a:avLst/>
@@ -4511,8 +4545,8 @@
         </p:nvSpPr>
         <p:spPr>
           <a:xfrm>
-            <a:off x="8257032" y="4965192"/>
-            <a:ext cx="1664208" cy="201168"/>
+            <a:off x="8229596" y="4864608"/>
+            <a:ext cx="1709927" cy="201168"/>
           </a:xfrm>
           <a:prstGeom prst="rect">
             <a:avLst/>
@@ -4534,7 +4568,7 @@
                 <a:latin typeface="Microsoft YaHei"/>
                 <a:ea typeface="Microsoft YaHei"/>
               </a:rPr>
-              <a:t>RL 训练网络架构：安…</a:t>
+              <a:t>大规格并发启动</a:t>
             </a:r>
           </a:p>
         </p:txBody>
@@ -4547,8 +4581,8 @@
         </p:nvSpPr>
         <p:spPr>
           <a:xfrm>
-            <a:off x="8257032" y="5166360"/>
-            <a:ext cx="1664208" cy="237744"/>
+            <a:off x="8229596" y="5065776"/>
+            <a:ext cx="1709927" cy="256032"/>
           </a:xfrm>
           <a:prstGeom prst="rect">
             <a:avLst/>
@@ -4570,7 +4604,7 @@
                 <a:latin typeface="Microsoft YaHei"/>
                 <a:ea typeface="Microsoft YaHei"/>
               </a:rPr>
-              <a:t>部署：北京/上海/乌兰察布多 …</a:t>
+              <a:t>演讲口径</a:t>
             </a:r>
           </a:p>
         </p:txBody>
@@ -4583,8 +4617,8 @@
         </p:nvSpPr>
         <p:spPr>
           <a:xfrm>
-            <a:off x="8257032" y="5413248"/>
-            <a:ext cx="1664208" cy="292608"/>
+            <a:off x="8229596" y="5340096"/>
+            <a:ext cx="1709927" cy="365760"/>
           </a:xfrm>
           <a:prstGeom prst="rect">
             <a:avLst/>
@@ -4599,14 +4633,14 @@
           <a:p>
             <a:pPr algn="l"/>
             <a:r>
-              <a:rPr sz="1400" b="1">
+              <a:rPr sz="1200" b="1">
                 <a:solidFill>
                   <a:srgbClr val="8B1A2B"/>
                 </a:solidFill>
                 <a:latin typeface="Microsoft YaHei"/>
                 <a:ea typeface="Microsoft YaHei"/>
               </a:rPr>
-              <a:t>弹性：Sandbox 秒级加载扩缩</a:t>
+              <a:t>1~2s（5000 并发 / 3GB 镜像）</a:t>
             </a:r>
           </a:p>
         </p:txBody>
@@ -4619,8 +4653,8 @@
         </p:nvSpPr>
         <p:spPr>
           <a:xfrm>
-            <a:off x="10104120" y="4910328"/>
-            <a:ext cx="1847088" cy="868680"/>
+            <a:off x="10104115" y="4809744"/>
+            <a:ext cx="1874519" cy="960120"/>
           </a:xfrm>
           <a:prstGeom prst="rect">
             <a:avLst/>
@@ -4664,8 +4698,8 @@
         </p:nvSpPr>
         <p:spPr>
           <a:xfrm>
-            <a:off x="10213848" y="4965192"/>
-            <a:ext cx="1664208" cy="201168"/>
+            <a:off x="10195555" y="4864608"/>
+            <a:ext cx="1709927" cy="201168"/>
           </a:xfrm>
           <a:prstGeom prst="rect">
             <a:avLst/>
@@ -4687,7 +4721,7 @@
                 <a:latin typeface="Microsoft YaHei"/>
                 <a:ea typeface="Microsoft YaHei"/>
               </a:rPr>
-              <a:t>RL 工具与环境五层生态</a:t>
+              <a:t>综合 TCO</a:t>
             </a:r>
           </a:p>
         </p:txBody>
@@ -4700,8 +4734,8 @@
         </p:nvSpPr>
         <p:spPr>
           <a:xfrm>
-            <a:off x="10213848" y="5166360"/>
-            <a:ext cx="1664208" cy="237744"/>
+            <a:off x="10195555" y="5065776"/>
+            <a:ext cx="1709927" cy="256032"/>
           </a:xfrm>
           <a:prstGeom prst="rect">
             <a:avLst/>
@@ -4723,7 +4757,7 @@
                 <a:latin typeface="Microsoft YaHei"/>
                 <a:ea typeface="Microsoft YaHei"/>
               </a:rPr>
-              <a:t>本机系统工具：本地命令/服务直…</a:t>
+              <a:t>演讲口径</a:t>
             </a:r>
           </a:p>
         </p:txBody>
@@ -4736,8 +4770,8 @@
         </p:nvSpPr>
         <p:spPr>
           <a:xfrm>
-            <a:off x="10213848" y="5413248"/>
-            <a:ext cx="1664208" cy="292608"/>
+            <a:off x="10195555" y="5340096"/>
+            <a:ext cx="1709927" cy="365760"/>
           </a:xfrm>
           <a:prstGeom prst="rect">
             <a:avLst/>
@@ -4752,14 +4786,14 @@
           <a:p>
             <a:pPr algn="l"/>
             <a:r>
-              <a:rPr sz="1400" b="1">
+              <a:rPr sz="1200" b="1">
                 <a:solidFill>
                   <a:srgbClr val="8B1A2B"/>
                 </a:solidFill>
                 <a:latin typeface="Microsoft YaHei"/>
                 <a:ea typeface="Microsoft YaHei"/>
               </a:rPr>
-              <a:t>工具接入路径：本机 → 内建 → …</a:t>
+              <a:t>约 -50%</a:t>
             </a:r>
           </a:p>
         </p:txBody>
@@ -4772,8 +4806,8 @@
         </p:nvSpPr>
         <p:spPr>
           <a:xfrm>
-            <a:off x="0" y="5989320"/>
-            <a:ext cx="12191695" cy="868680"/>
+            <a:off x="0" y="5870448"/>
+            <a:ext cx="12191695" cy="987552"/>
           </a:xfrm>
           <a:prstGeom prst="rect">
             <a:avLst/>
@@ -4815,8 +4849,8 @@
         </p:nvSpPr>
         <p:spPr>
           <a:xfrm>
-            <a:off x="365760" y="6080760"/>
-            <a:ext cx="11430000" cy="256032"/>
+            <a:off x="320040" y="5943600"/>
+            <a:ext cx="11521440" cy="502920"/>
           </a:xfrm>
           <a:prstGeom prst="rect">
             <a:avLst/>
@@ -4831,14 +4865,14 @@
           <a:p>
             <a:pPr algn="l"/>
             <a:r>
-              <a:rPr sz="1200" b="1">
+              <a:rPr sz="1100" b="1">
                 <a:solidFill>
                   <a:srgbClr val="1A1A1A"/>
                 </a:solidFill>
                 <a:latin typeface="Microsoft YaHei"/>
                 <a:ea typeface="Microsoft YaHei"/>
               </a:rPr>
-              <a:t>可落地动作：把 Agent Sandbox 定位为 RL 采样与 Agent 工具执行的共享执行面，用 E2B 兼容 API + MicroVM 隔离进入 HCS 产品目录。；Agentic RL 平台按控制面/Sandbox/GPU 训练面/观测面…</a:t>
+              <a:t>可落地动作：把 Agent Sandbox 定位为 RL 采样与 Agent 工具执行的共享执行面，用 E2B 兼容 API + MicroVM 隔离进入 HCS 产品目录；Agentic RL 平台按控制面/Sandbox/GPU 训练面/观测面建设，采样与训练队列解耦，网络上坚持客户 VPC 内网通道与镜像分层预热；训练方法补齐 GRPO/PPO/蒸馏与独立 Eval（pass@k），工具层用 MCP + VPC 内网接口化覆盖企业真题，形成可售卖的多租户 RL/Eval 闭环。</a:t>
             </a:r>
           </a:p>
         </p:txBody>
@@ -4851,8 +4885,8 @@
         </p:nvSpPr>
         <p:spPr>
           <a:xfrm>
-            <a:off x="365760" y="6373368"/>
-            <a:ext cx="11430000" cy="256032"/>
+            <a:off x="320040" y="6437376"/>
+            <a:ext cx="11521440" cy="256032"/>
           </a:xfrm>
           <a:prstGeom prst="rect">
             <a:avLst/>
@@ -4867,7 +4901,7 @@
           <a:p>
             <a:pPr algn="l"/>
             <a:r>
-              <a:rPr sz="1000" b="0">
+              <a:rPr sz="900" b="0">
                 <a:solidFill>
                   <a:srgbClr val="6B6B6B"/>
                 </a:solidFill>
@@ -5109,7 +5143,7 @@
         <p:spPr>
           <a:xfrm>
             <a:off x="429768" y="1143000"/>
-            <a:ext cx="3496970" cy="292608"/>
+            <a:ext cx="3496970" cy="384048"/>
           </a:xfrm>
           <a:prstGeom prst="rect">
             <a:avLst/>
@@ -5131,7 +5165,7 @@
                 <a:latin typeface="Microsoft YaHei"/>
                 <a:ea typeface="Microsoft YaHei"/>
               </a:rPr>
-              <a:t>隔离：MicroVM + 访问控制</a:t>
+              <a:t>接口：API First · E2B 原生兼容 · 隔离：MicroVM + 访问控制</a:t>
             </a:r>
           </a:p>
         </p:txBody>
@@ -5152,7 +5186,7 @@
         </p:blipFill>
         <p:spPr>
           <a:xfrm>
-            <a:off x="429768" y="1928092"/>
+            <a:off x="429768" y="1946380"/>
             <a:ext cx="3496970" cy="2965239"/>
           </a:xfrm>
           <a:prstGeom prst="rect">
@@ -5250,7 +5284,7 @@
         <p:spPr>
           <a:xfrm>
             <a:off x="4347362" y="1143000"/>
-            <a:ext cx="3496970" cy="292608"/>
+            <a:ext cx="3496970" cy="384048"/>
           </a:xfrm>
           <a:prstGeom prst="rect">
             <a:avLst/>
@@ -5272,7 +5306,7 @@
                 <a:latin typeface="Microsoft YaHei"/>
                 <a:ea typeface="Microsoft YaHei"/>
               </a:rPr>
-              <a:t>上手：5 分钟</a:t>
+              <a:t>上手：5 分钟 · 创建速率：100,000/分钟</a:t>
             </a:r>
           </a:p>
         </p:txBody>
@@ -5293,7 +5327,7 @@
         </p:blipFill>
         <p:spPr>
           <a:xfrm>
-            <a:off x="4347362" y="1928092"/>
+            <a:off x="4347362" y="1946380"/>
             <a:ext cx="3496970" cy="2965239"/>
           </a:xfrm>
           <a:prstGeom prst="rect">
@@ -5332,7 +5366,7 @@
                 <a:latin typeface="Microsoft YaHei"/>
                 <a:ea typeface="Microsoft YaHei"/>
               </a:rPr>
-              <a:t>百炼 Loop Engineering：RL Loop…</a:t>
+              <a:t>百炼 Loop Engineering：RL Loop 与 Agent Loop 共用沙箱</a:t>
             </a:r>
           </a:p>
         </p:txBody>
@@ -5391,7 +5425,7 @@
         <p:spPr>
           <a:xfrm>
             <a:off x="8264956" y="1143000"/>
-            <a:ext cx="3496970" cy="292608"/>
+            <a:ext cx="3496970" cy="384048"/>
           </a:xfrm>
           <a:prstGeom prst="rect">
             <a:avLst/>
@@ -5413,7 +5447,7 @@
                 <a:latin typeface="Microsoft YaHei"/>
                 <a:ea typeface="Microsoft YaHei"/>
               </a:rPr>
-              <a:t>蒸馏：OPD 作为一等训练方法</a:t>
+              <a:t>RL 算法产品化：PPO / GRPO · 蒸馏：OPD 作为一等训练方法</a:t>
             </a:r>
           </a:p>
         </p:txBody>
@@ -5434,7 +5468,7 @@
         </p:blipFill>
         <p:spPr>
           <a:xfrm>
-            <a:off x="8264956" y="1928092"/>
+            <a:off x="8264956" y="1946380"/>
             <a:ext cx="3496970" cy="2965239"/>
           </a:xfrm>
           <a:prstGeom prst="rect">

--- a/yunqi-2026-agenda-201/docs/洞察一页-02-Agent Sandbox 加速训练与评测闭环与百炼 A.pptx
+++ b/yunqi-2026-agenda-201/docs/洞察一页-02-Agent Sandbox 加速训练与评测闭环与百炼 A.pptx
@@ -3242,7 +3242,7 @@
                 <a:latin typeface="Microsoft YaHei"/>
                 <a:ea typeface="Microsoft YaHei"/>
               </a:rPr>
-              <a:t>洞察：把 Agent Sandbox 定位为 RL 采样与 Agent 工具执行的共享执行面，用 E2B 兼容 API + MicroVM 隔离进入 HCS 产品目录。</a:t>
+              <a:t>洞察：把 Agent Sandbox 定位为 RL 采样与 Agent 工具执行的共享执行面，用 E2B 兼容 API + MicroVM 隔离纳入产品能力目录。</a:t>
             </a:r>
           </a:p>
         </p:txBody>
@@ -3323,7 +3323,7 @@
                 <a:latin typeface="Microsoft YaHei"/>
                 <a:ea typeface="Microsoft YaHei"/>
               </a:rPr>
-              <a:t>一句话判断：本场前半由洪晓龙产品化讲解 Agent Sandbox：以 API First、E2B 原生兼容将代码任务、交互任务与批量评测统一到 MicroVM 隔离环境，支撑探索、验证与规模评测。</a:t>
+              <a:t>一句话判断：阿里云 Agent Sandbox / 百炼——以 API First、E2B 原生兼容将代码任务、交互任务与批量评测统一到 MicroVM 隔离环境，支撑探索、验证与规模评测。</a:t>
             </a:r>
           </a:p>
         </p:txBody>
@@ -3444,7 +3444,7 @@
                 <a:latin typeface="Microsoft YaHei"/>
                 <a:ea typeface="Microsoft YaHei"/>
               </a:rPr>
-              <a:t>HCS 应把「评测/训练用临时环境」与「在线 Serving 沙箱」统一为同一产品的不同 QoS 档位，并提供 E2B 兼容 SDK</a:t>
+              <a:t>需要把「评测/训练用临时环境」与「在线 Serving 沙箱」统一为同一产品的不同 QoS 档位，并提供 E2B 兼容 SDK</a:t>
             </a:r>
           </a:p>
           <a:p>
@@ -3616,7 +3616,7 @@
                 <a:latin typeface="Microsoft YaHei"/>
                 <a:ea typeface="Microsoft YaHei"/>
               </a:rPr>
-              <a:t>HCS 规划 RL 平台时必须把 Sandbox 作为采样与奖励执行的一等公民，而不是训练集群附属脚本</a:t>
+              <a:t>规划 RL 平台时必须把 Sandbox 作为采样与奖励执行的一等公民，而不是训练集群附属脚本</a:t>
             </a:r>
           </a:p>
           <a:p>
@@ -3956,7 +3956,7 @@
                 <a:latin typeface="Microsoft YaHei"/>
                 <a:ea typeface="Microsoft YaHei"/>
               </a:rPr>
-              <a:t>接口</a:t>
+              <a:t>综合 TCO</a:t>
             </a:r>
           </a:p>
         </p:txBody>
@@ -3992,7 +3992,7 @@
                 <a:latin typeface="Microsoft YaHei"/>
                 <a:ea typeface="Microsoft YaHei"/>
               </a:rPr>
-              <a:t>演讲口径</a:t>
+              <a:t>百炼 Loop Engineering</a:t>
             </a:r>
           </a:p>
         </p:txBody>
@@ -4028,7 +4028,7 @@
                 <a:latin typeface="Microsoft YaHei"/>
                 <a:ea typeface="Microsoft YaHei"/>
               </a:rPr>
-              <a:t>API First · E2B 原生兼容</a:t>
+              <a:t>约 -50%</a:t>
             </a:r>
           </a:p>
         </p:txBody>
@@ -4109,7 +4109,7 @@
                 <a:latin typeface="Microsoft YaHei"/>
                 <a:ea typeface="Microsoft YaHei"/>
               </a:rPr>
-              <a:t>隔离</a:t>
+              <a:t>创建速率</a:t>
             </a:r>
           </a:p>
         </p:txBody>
@@ -4145,7 +4145,7 @@
                 <a:latin typeface="Microsoft YaHei"/>
                 <a:ea typeface="Microsoft YaHei"/>
               </a:rPr>
-              <a:t>演讲口径</a:t>
+              <a:t>百炼 Loop Engineering</a:t>
             </a:r>
           </a:p>
         </p:txBody>
@@ -4181,7 +4181,7 @@
                 <a:latin typeface="Microsoft YaHei"/>
                 <a:ea typeface="Microsoft YaHei"/>
               </a:rPr>
-              <a:t>MicroVM + 访问控制</a:t>
+              <a:t>100,000/分钟</a:t>
             </a:r>
           </a:p>
         </p:txBody>
@@ -4262,7 +4262,7 @@
                 <a:latin typeface="Microsoft YaHei"/>
                 <a:ea typeface="Microsoft YaHei"/>
               </a:rPr>
-              <a:t>上手</a:t>
+              <a:t>RL 工具与环境五层生态</a:t>
             </a:r>
           </a:p>
         </p:txBody>
@@ -4298,7 +4298,7 @@
                 <a:latin typeface="Microsoft YaHei"/>
                 <a:ea typeface="Microsoft YaHei"/>
               </a:rPr>
-              <a:t>演讲口径</a:t>
+              <a:t>工具接入路径：本机</a:t>
             </a:r>
           </a:p>
         </p:txBody>
@@ -4334,7 +4334,7 @@
                 <a:latin typeface="Microsoft YaHei"/>
                 <a:ea typeface="Microsoft YaHei"/>
               </a:rPr>
-              <a:t>5 分钟</a:t>
+              <a:t>内建 → Sandbox 自定义 → VPC 内网 → 公网 MCP</a:t>
             </a:r>
           </a:p>
         </p:txBody>
@@ -4415,7 +4415,7 @@
                 <a:latin typeface="Microsoft YaHei"/>
                 <a:ea typeface="Microsoft YaHei"/>
               </a:rPr>
-              <a:t>创建速率</a:t>
+              <a:t>上手</a:t>
             </a:r>
           </a:p>
         </p:txBody>
@@ -4451,7 +4451,7 @@
                 <a:latin typeface="Microsoft YaHei"/>
                 <a:ea typeface="Microsoft YaHei"/>
               </a:rPr>
-              <a:t>演讲口径</a:t>
+              <a:t>百炼 Loop Engineering</a:t>
             </a:r>
           </a:p>
         </p:txBody>
@@ -4487,7 +4487,7 @@
                 <a:latin typeface="Microsoft YaHei"/>
                 <a:ea typeface="Microsoft YaHei"/>
               </a:rPr>
-              <a:t>100,000/分钟</a:t>
+              <a:t>5 分钟</a:t>
             </a:r>
           </a:p>
         </p:txBody>
@@ -4568,7 +4568,7 @@
                 <a:latin typeface="Microsoft YaHei"/>
                 <a:ea typeface="Microsoft YaHei"/>
               </a:rPr>
-              <a:t>大规格并发启动</a:t>
+              <a:t>蒸馏</a:t>
             </a:r>
           </a:p>
         </p:txBody>
@@ -4604,7 +4604,7 @@
                 <a:latin typeface="Microsoft YaHei"/>
                 <a:ea typeface="Microsoft YaHei"/>
               </a:rPr>
-              <a:t>演讲口径</a:t>
+              <a:t>百炼模型训练产品矩阵与典型流程</a:t>
             </a:r>
           </a:p>
         </p:txBody>
@@ -4640,7 +4640,7 @@
                 <a:latin typeface="Microsoft YaHei"/>
                 <a:ea typeface="Microsoft YaHei"/>
               </a:rPr>
-              <a:t>1~2s（5000 并发 / 3GB 镜像）</a:t>
+              <a:t>OPD 作为一等训练方法</a:t>
             </a:r>
           </a:p>
         </p:txBody>
@@ -4721,7 +4721,7 @@
                 <a:latin typeface="Microsoft YaHei"/>
                 <a:ea typeface="Microsoft YaHei"/>
               </a:rPr>
-              <a:t>综合 TCO</a:t>
+              <a:t>隔离</a:t>
             </a:r>
           </a:p>
         </p:txBody>
@@ -4757,7 +4757,7 @@
                 <a:latin typeface="Microsoft YaHei"/>
                 <a:ea typeface="Microsoft YaHei"/>
               </a:rPr>
-              <a:t>演讲口径</a:t>
+              <a:t>工具与环境执行产品化</a:t>
             </a:r>
           </a:p>
         </p:txBody>
@@ -4793,7 +4793,7 @@
                 <a:latin typeface="Microsoft YaHei"/>
                 <a:ea typeface="Microsoft YaHei"/>
               </a:rPr>
-              <a:t>约 -50%</a:t>
+              <a:t>MicroVM + 访问控制</a:t>
             </a:r>
           </a:p>
         </p:txBody>
@@ -4872,7 +4872,7 @@
                 <a:latin typeface="Microsoft YaHei"/>
                 <a:ea typeface="Microsoft YaHei"/>
               </a:rPr>
-              <a:t>可落地动作：把 Agent Sandbox 定位为 RL 采样与 Agent 工具执行的共享执行面，用 E2B 兼容 API + MicroVM 隔离进入 HCS 产品目录；Agentic RL 平台按控制面/Sandbox/GPU 训练面/观测面建设，采样与训练队列解耦，网络上坚持客户 VPC 内网通道与镜像分层预热；训练方法补齐 GRPO/PPO/蒸馏与独立 Eval（pass@k），工具层用 MCP + VPC 内网接口化覆盖企业真题，形成可售卖的多租户 RL/Eval 闭环。</a:t>
+              <a:t>启示要点：把 Agent Sandbox 定位为 RL 采样与 Agent 工具执行的共享执行面，用 E2B 兼容 API + MicroVM 隔离纳入产品能力目录；Agentic RL 平台按控制面/Sandbox/GPU 训练面/观测面建设，采样与训练队列解耦，网络上坚持客户 VPC 内网通道与镜像分层预热；训练方法补齐 GRPO/PPO/蒸馏与独立 Eval（pass@k），工具层用 MCP + VPC 内网接口化覆盖企业真题，形成可售卖的多租户 RL/Eval 闭环。</a:t>
             </a:r>
           </a:p>
         </p:txBody>
@@ -4908,7 +4908,7 @@
                 <a:latin typeface="Microsoft YaHei"/>
                 <a:ea typeface="Microsoft YaHei"/>
               </a:rPr>
-              <a:t>来源：https://yunqi.aliyun.com/2026/session?agendaId=201 · Talk 02 洪晓龙 / 罗自荣  ·  视角：HCS 技术规划</a:t>
+              <a:t>来源：https://yunqi.aliyun.com/2026/session?agendaId=201 · Talk 02 洪晓龙 / 罗自荣</a:t>
             </a:r>
           </a:p>
         </p:txBody>
